--- a/#1 Introduction to Artificial Intelligence (AI).pptx
+++ b/#1 Introduction to Artificial Intelligence (AI).pptx
@@ -5432,48 +5432,6 @@
           </a:p>
         </p:txBody>
       </p:sp>
-      <p:cxnSp>
-        <p:nvCxnSpPr>
-          <p:cNvPr id="10" name="Straight Arrow Connector 9">
-            <a:extLst>
-              <a:ext uri="{FF2B5EF4-FFF2-40B4-BE49-F238E27FC236}">
-                <a16:creationId xmlns:a16="http://schemas.microsoft.com/office/drawing/2014/main" id="{8FD9BCFB-9360-B2A6-1C84-7715A1DF6E03}"/>
-              </a:ext>
-            </a:extLst>
-          </p:cNvPr>
-          <p:cNvCxnSpPr/>
-          <p:nvPr/>
-        </p:nvCxnSpPr>
-        <p:spPr>
-          <a:xfrm>
-            <a:off x="5162944" y="3453394"/>
-            <a:ext cx="1463040" cy="79513"/>
-          </a:xfrm>
-          <a:prstGeom prst="straightConnector1">
-            <a:avLst/>
-          </a:prstGeom>
-          <a:ln>
-            <a:solidFill>
-              <a:srgbClr val="FF0000"/>
-            </a:solidFill>
-            <a:tailEnd type="triangle"/>
-          </a:ln>
-        </p:spPr>
-        <p:style>
-          <a:lnRef idx="2">
-            <a:schemeClr val="accent2"/>
-          </a:lnRef>
-          <a:fillRef idx="0">
-            <a:schemeClr val="accent2"/>
-          </a:fillRef>
-          <a:effectRef idx="1">
-            <a:schemeClr val="accent2"/>
-          </a:effectRef>
-          <a:fontRef idx="minor">
-            <a:schemeClr val="tx1"/>
-          </a:fontRef>
-        </p:style>
-      </p:cxnSp>
       <p:sp>
         <p:nvSpPr>
           <p:cNvPr id="11" name="TextBox 10">
@@ -5616,50 +5574,6 @@
           </a:p>
         </p:txBody>
       </p:sp>
-      <p:cxnSp>
-        <p:nvCxnSpPr>
-          <p:cNvPr id="16" name="Straight Arrow Connector 15">
-            <a:extLst>
-              <a:ext uri="{FF2B5EF4-FFF2-40B4-BE49-F238E27FC236}">
-                <a16:creationId xmlns:a16="http://schemas.microsoft.com/office/drawing/2014/main" id="{0BB26B3B-F789-FFD6-80E7-B563A8EA8D26}"/>
-              </a:ext>
-            </a:extLst>
-          </p:cNvPr>
-          <p:cNvCxnSpPr>
-            <a:cxnSpLocks/>
-          </p:cNvCxnSpPr>
-          <p:nvPr/>
-        </p:nvCxnSpPr>
-        <p:spPr>
-          <a:xfrm flipV="1">
-            <a:off x="6993070" y="2735249"/>
-            <a:ext cx="576572" cy="711930"/>
-          </a:xfrm>
-          <a:prstGeom prst="straightConnector1">
-            <a:avLst/>
-          </a:prstGeom>
-          <a:ln>
-            <a:solidFill>
-              <a:srgbClr val="FF0000"/>
-            </a:solidFill>
-            <a:tailEnd type="triangle"/>
-          </a:ln>
-        </p:spPr>
-        <p:style>
-          <a:lnRef idx="2">
-            <a:schemeClr val="accent2"/>
-          </a:lnRef>
-          <a:fillRef idx="0">
-            <a:schemeClr val="accent2"/>
-          </a:fillRef>
-          <a:effectRef idx="1">
-            <a:schemeClr val="accent2"/>
-          </a:effectRef>
-          <a:fontRef idx="minor">
-            <a:schemeClr val="tx1"/>
-          </a:fontRef>
-        </p:style>
-      </p:cxnSp>
       <p:sp>
         <p:nvSpPr>
           <p:cNvPr id="18" name="TextBox 17">
@@ -5755,50 +5669,6 @@
           </a:p>
         </p:txBody>
       </p:sp>
-      <p:cxnSp>
-        <p:nvCxnSpPr>
-          <p:cNvPr id="20" name="Straight Arrow Connector 19">
-            <a:extLst>
-              <a:ext uri="{FF2B5EF4-FFF2-40B4-BE49-F238E27FC236}">
-                <a16:creationId xmlns:a16="http://schemas.microsoft.com/office/drawing/2014/main" id="{26FAA26D-3A29-A4AD-A301-ABF34B0288A4}"/>
-              </a:ext>
-            </a:extLst>
-          </p:cNvPr>
-          <p:cNvCxnSpPr>
-            <a:cxnSpLocks/>
-          </p:cNvCxnSpPr>
-          <p:nvPr/>
-        </p:nvCxnSpPr>
-        <p:spPr>
-          <a:xfrm>
-            <a:off x="8091675" y="2586534"/>
-            <a:ext cx="1616868" cy="562183"/>
-          </a:xfrm>
-          <a:prstGeom prst="straightConnector1">
-            <a:avLst/>
-          </a:prstGeom>
-          <a:ln>
-            <a:solidFill>
-              <a:srgbClr val="FF0000"/>
-            </a:solidFill>
-            <a:tailEnd type="triangle"/>
-          </a:ln>
-        </p:spPr>
-        <p:style>
-          <a:lnRef idx="2">
-            <a:schemeClr val="accent2"/>
-          </a:lnRef>
-          <a:fillRef idx="0">
-            <a:schemeClr val="accent2"/>
-          </a:fillRef>
-          <a:effectRef idx="1">
-            <a:schemeClr val="accent2"/>
-          </a:effectRef>
-          <a:fontRef idx="minor">
-            <a:schemeClr val="tx1"/>
-          </a:fontRef>
-        </p:style>
-      </p:cxnSp>
       <p:sp>
         <p:nvSpPr>
           <p:cNvPr id="22" name="TextBox 21">
